--- a/inzigo-site/Mysilah-doc.pptx
+++ b/inzigo-site/Mysilah-doc.pptx
@@ -18867,7 +18867,7 @@
                 <a:cs typeface="Calibri"/>
                 <a:sym typeface="Calibri"/>
               </a:rPr>
-              <a:t>This service is only for registered users, please contact MySilah in order to access the services </a:t>
+              <a:t>This Service is only for registered users, please contact MySilah in order to access the services </a:t>
             </a:r>
             <a:endParaRPr sz="1100"/>
           </a:p>
@@ -19395,7 +19395,7 @@
                 <a:cs typeface="Calibri"/>
                 <a:sym typeface="Calibri"/>
               </a:rPr>
-              <a:t>EN: UAE PASS displays an error for invalid credentials. If the OAuth callback fails, user is redirected to app.mysilah.ae/login with: "Login failed. Please try again."</a:t>
+              <a:t>EN: UAE PASS displays an error for invalid credentials. If the OAuth callback fails, user is redirected to app.mysilah.ae/login with: "Something went wrong during the login, please try again later!"</a:t>
             </a:r>
             <a:endParaRPr sz="1100"/>
           </a:p>
@@ -19535,7 +19535,7 @@
                 <a:cs typeface="Roboto"/>
                 <a:sym typeface="Roboto"/>
               </a:rPr>
-              <a:t>User cancelled the login</a:t>
+              <a:t>User cancelled the login.</a:t>
             </a:r>
             <a:endParaRPr sz="1400">
               <a:solidFill>
@@ -22128,7 +22128,7 @@
                 <a:cs typeface="Calibri"/>
                 <a:sym typeface="Calibri"/>
               </a:rPr>
-              <a:t>EN: Existing MySilah user clicks "Sign in with UAE PASS" on login page → UAE PASS authenticates → System recognises linked account by UAE PASS UUID → User logged in directly to Agent Dashboard.</a:t>
+              <a:t>EN: Existing MySilah user clicks “Sign in with UAE PASS” on login page → UAE PASS authenticates at SOP2 or SOP3 level → System recognises linked account by UAE PASS UUID → User logged in directly to Agent Dashboard. MySilah accepts both SOP2 (verified residents) and SOP3 (UAE nationals with verified Emirates ID).</a:t>
             </a:r>
             <a:endParaRPr sz="1100"/>
           </a:p>
@@ -22316,7 +22316,7 @@
                 <a:cs typeface="Calibri"/>
                 <a:sym typeface="Calibri"/>
               </a:rPr>
-              <a:t>EN: Upon successful UAE PASS authentication, the user lands on the MySilah Agent Dashboard displaying their name, referral code, payout summary, active cases, and recent leads.</a:t>
+              <a:t>EN: MySilah supports SOP3 authentication (UAE nationals with verified Emirates ID). Upon SOP3 authentication, additional verified attributes are received including the user’s title (titleEN/titleAR), which is displayed alongside their name on the Agent Dashboard. SOP3 users have full access to all MySilah Agent services at the highest verification level.</a:t>
             </a:r>
             <a:endParaRPr sz="1100"/>
           </a:p>
